--- a/media/resources/files/Algebra-OneStepVar1Side-NonCalc.pptx
+++ b/media/resources/files/Algebra-OneStepVar1Side-NonCalc.pptx
@@ -3220,7 +3220,7 @@
                 </a:solidFill>
                 <a:latin typeface="Arial"/>
               </a:rPr>
-              <a:t>1-кадамдуу теңдемелер  ·  7–8-класс</a:t>
+              <a:t>1-кадамдуу теңдемелер</a:t>
             </a:r>
           </a:p>
         </p:txBody>

--- a/media/resources/files/Algebra-OneStepVar1Side-NonCalc.pptx
+++ b/media/resources/files/Algebra-OneStepVar1Side-NonCalc.pptx
@@ -3308,7 +3308,7 @@
                 </a:solidFill>
                 <a:latin typeface="Arial"/>
               </a:rPr>
-              <a:t>Көнүгүү — өзүңүз чечиңиз</a:t>
+              <a:t>Көнүгүү — өзүңүз чыгарыңыз</a:t>
             </a:r>
           </a:p>
         </p:txBody>
@@ -3859,7 +3859,7 @@
                 </a:solidFill>
                 <a:latin typeface="Arial"/>
               </a:rPr>
-              <a:t>•  x + a = b,  x − a = b,  a·x = b,  x : a = b түрүндөгү теңдемелерди чечүү</a:t>
+              <a:t>•  x + a = b,  x − a = b,  a·x = b,  x : a = b түрүндөгү теңдемелерди чыгаруу</a:t>
             </a:r>
           </a:p>
           <a:p>
